--- a/04-25/04.25-组会报告-刘子豪.pptx
+++ b/04-25/04.25-组会报告-刘子豪.pptx
@@ -3834,7 +3834,7 @@
                 <a:latin typeface="Microsoft YaHei" panose="020B0503020204020204" pitchFamily="34" charset="-122"/>
                 <a:ea typeface="Microsoft YaHei" panose="020B0503020204020204" pitchFamily="34" charset="-122"/>
               </a:rPr>
-              <a:t>—2026</a:t>
+              <a:t>—2026年04月25日—</a:t>
             </a:r>
             <a:r>
               <a:rPr lang="zh-CN" altLang="en-US" b="1" dirty="0">
@@ -3851,7 +3851,7 @@
                 <a:latin typeface="Microsoft YaHei" panose="020B0503020204020204" pitchFamily="34" charset="-122"/>
                 <a:ea typeface="Microsoft YaHei" panose="020B0503020204020204" pitchFamily="34" charset="-122"/>
               </a:rPr>
-              <a:t>年</a:t>
+              <a:t/>
             </a:r>
             <a:r>
               <a:rPr lang="en-US" altLang="zh-CN" b="1" dirty="0">
@@ -3868,7 +3868,7 @@
                 <a:latin typeface="Microsoft YaHei" panose="020B0503020204020204" pitchFamily="34" charset="-122"/>
                 <a:ea typeface="Microsoft YaHei" panose="020B0503020204020204" pitchFamily="34" charset="-122"/>
               </a:rPr>
-              <a:t>04</a:t>
+              <a:t/>
             </a:r>
             <a:r>
               <a:rPr lang="zh-CN" altLang="en-US" b="1" dirty="0">
@@ -3885,7 +3885,7 @@
                 <a:latin typeface="Microsoft YaHei" panose="020B0503020204020204" pitchFamily="34" charset="-122"/>
                 <a:ea typeface="Microsoft YaHei" panose="020B0503020204020204" pitchFamily="34" charset="-122"/>
               </a:rPr>
-              <a:t>月</a:t>
+              <a:t/>
             </a:r>
             <a:r>
               <a:rPr lang="en-US" altLang="zh-CN" b="1" dirty="0">
@@ -3902,7 +3902,7 @@
                 <a:latin typeface="Microsoft YaHei" panose="020B0503020204020204" pitchFamily="34" charset="-122"/>
                 <a:ea typeface="Microsoft YaHei" panose="020B0503020204020204" pitchFamily="34" charset="-122"/>
               </a:rPr>
-              <a:t>25</a:t>
+              <a:t/>
             </a:r>
             <a:r>
               <a:rPr lang="zh-CN" altLang="en-US" b="1" dirty="0">
@@ -3919,7 +3919,7 @@
                 <a:latin typeface="Microsoft YaHei" panose="020B0503020204020204" pitchFamily="34" charset="-122"/>
                 <a:ea typeface="Microsoft YaHei" panose="020B0503020204020204" pitchFamily="34" charset="-122"/>
               </a:rPr>
-              <a:t>日</a:t>
+              <a:t/>
             </a:r>
             <a:r>
               <a:rPr lang="en-US" altLang="zh-CN" b="1" dirty="0">
@@ -3936,7 +3936,7 @@
                 <a:latin typeface="Microsoft YaHei" panose="020B0503020204020204" pitchFamily="34" charset="-122"/>
                 <a:ea typeface="Microsoft YaHei" panose="020B0503020204020204" pitchFamily="34" charset="-122"/>
               </a:rPr>
-              <a:t>—</a:t>
+              <a:t/>
             </a:r>
             <a:endParaRPr lang="zh-CN" altLang="en-US" dirty="0"/>
           </a:p>
